--- a/m2/diapositivos/sessao-03-m2-f07.pptx
+++ b/m2/diapositivos/sessao-03-m2-f07.pptx
@@ -2590,7 +2590,7 @@
               <a:buNone/>
             </a:pPr>
             <a:r>
-              <a:rPr lang="en-US" sz="2300" dirty="0">
+              <a:rPr lang="en-US" sz="2300" b="1" dirty="0">
                 <a:solidFill>
                   <a:srgbClr val="F2F0EA"/>
                 </a:solidFill>
@@ -2598,7 +2598,24 @@
                 <a:ea typeface="Georgia" pitchFamily="34" charset="-122"/>
                 <a:cs typeface="Georgia" pitchFamily="34" charset="-120"/>
               </a:rPr>
-              <a:t>Coordenadas (as orações ligam-se sem que nenhuma esteja dentro da outra): copulativas (e, nem), adversativas (mas; também porém, contudo, todavia, que são advérbios de ligação), disjuntivas (ou), conclusivas (logo; também portanto e por isso, advérbios de ligação), explicativas (pois, que).</a:t>
+              <a:t>Coordenadas</a:t>
+            </a:r>
+            <a:pPr indent="0" marL="0">
+              <a:lnSpc>
+                <a:spcPct val="120000"/>
+              </a:lnSpc>
+              <a:buNone/>
+            </a:pPr>
+            <a:r>
+              <a:rPr lang="en-US" sz="2300" dirty="0">
+                <a:solidFill>
+                  <a:srgbClr val="F2F0EA"/>
+                </a:solidFill>
+                <a:latin typeface="Georgia" pitchFamily="34" charset="0"/>
+                <a:ea typeface="Georgia" pitchFamily="34" charset="-122"/>
+                <a:cs typeface="Georgia" pitchFamily="34" charset="-120"/>
+              </a:rPr>
+              <a:t> (as orações ligam-se sem que nenhuma esteja dentro da outra): copulativas (e, nem), adversativas (mas; também porém, contudo, todavia, que são advérbios de ligação), disjuntivas (ou), conclusivas (logo; também portanto e por isso, advérbios de ligação), explicativas (pois, que).</a:t>
             </a:r>
             <a:endParaRPr lang="en-US" sz="2300" dirty="0"/>
           </a:p>
@@ -4892,7 +4909,7 @@
               <a:buNone/>
             </a:pPr>
             <a:r>
-              <a:rPr lang="en-US" sz="2300" dirty="0">
+              <a:rPr lang="en-US" sz="2300" b="1" dirty="0">
                 <a:solidFill>
                   <a:srgbClr val="F2F0EA"/>
                 </a:solidFill>
@@ -4900,7 +4917,126 @@
                 <a:ea typeface="Georgia" pitchFamily="34" charset="-122"/>
                 <a:cs typeface="Georgia" pitchFamily="34" charset="-120"/>
               </a:rPr>
-              <a:t>Subordinadas (uma ocupa um lugar dentro da outra): substantivas completivas (que, se) ou relativas sem antecedente; adjetivas relativas restritivas ou explicativas; adverbiais causais (porque), temporais (quando), condicionais (se), finais (para que), concessivas (embora), consecutivas (tão… que), comparativas (como).</a:t>
+              <a:t>Subordinadas</a:t>
+            </a:r>
+            <a:pPr indent="0" marL="0">
+              <a:lnSpc>
+                <a:spcPct val="120000"/>
+              </a:lnSpc>
+              <a:buNone/>
+            </a:pPr>
+            <a:r>
+              <a:rPr lang="en-US" sz="2300" dirty="0">
+                <a:solidFill>
+                  <a:srgbClr val="F2F0EA"/>
+                </a:solidFill>
+                <a:latin typeface="Georgia" pitchFamily="34" charset="0"/>
+                <a:ea typeface="Georgia" pitchFamily="34" charset="-122"/>
+                <a:cs typeface="Georgia" pitchFamily="34" charset="-120"/>
+              </a:rPr>
+              <a:t> (uma ocupa um lugar dentro da outra): </a:t>
+            </a:r>
+            <a:pPr indent="0" marL="0">
+              <a:lnSpc>
+                <a:spcPct val="120000"/>
+              </a:lnSpc>
+              <a:buNone/>
+            </a:pPr>
+            <a:r>
+              <a:rPr lang="en-US" sz="2300" b="1" dirty="0">
+                <a:solidFill>
+                  <a:srgbClr val="F2F0EA"/>
+                </a:solidFill>
+                <a:latin typeface="Georgia" pitchFamily="34" charset="0"/>
+                <a:ea typeface="Georgia" pitchFamily="34" charset="-122"/>
+                <a:cs typeface="Georgia" pitchFamily="34" charset="-120"/>
+              </a:rPr>
+              <a:t>substantivas</a:t>
+            </a:r>
+            <a:pPr indent="0" marL="0">
+              <a:lnSpc>
+                <a:spcPct val="120000"/>
+              </a:lnSpc>
+              <a:buNone/>
+            </a:pPr>
+            <a:r>
+              <a:rPr lang="en-US" sz="2300" dirty="0">
+                <a:solidFill>
+                  <a:srgbClr val="F2F0EA"/>
+                </a:solidFill>
+                <a:latin typeface="Georgia" pitchFamily="34" charset="0"/>
+                <a:ea typeface="Georgia" pitchFamily="34" charset="-122"/>
+                <a:cs typeface="Georgia" pitchFamily="34" charset="-120"/>
+              </a:rPr>
+              <a:t> completivas (que, se) ou relativas sem antecedente; </a:t>
+            </a:r>
+            <a:pPr indent="0" marL="0">
+              <a:lnSpc>
+                <a:spcPct val="120000"/>
+              </a:lnSpc>
+              <a:buNone/>
+            </a:pPr>
+            <a:r>
+              <a:rPr lang="en-US" sz="2300" b="1" dirty="0">
+                <a:solidFill>
+                  <a:srgbClr val="F2F0EA"/>
+                </a:solidFill>
+                <a:latin typeface="Georgia" pitchFamily="34" charset="0"/>
+                <a:ea typeface="Georgia" pitchFamily="34" charset="-122"/>
+                <a:cs typeface="Georgia" pitchFamily="34" charset="-120"/>
+              </a:rPr>
+              <a:t>adjetivas relativas</a:t>
+            </a:r>
+            <a:pPr indent="0" marL="0">
+              <a:lnSpc>
+                <a:spcPct val="120000"/>
+              </a:lnSpc>
+              <a:buNone/>
+            </a:pPr>
+            <a:r>
+              <a:rPr lang="en-US" sz="2300" dirty="0">
+                <a:solidFill>
+                  <a:srgbClr val="F2F0EA"/>
+                </a:solidFill>
+                <a:latin typeface="Georgia" pitchFamily="34" charset="0"/>
+                <a:ea typeface="Georgia" pitchFamily="34" charset="-122"/>
+                <a:cs typeface="Georgia" pitchFamily="34" charset="-120"/>
+              </a:rPr>
+              <a:t> restritivas ou explicativas; </a:t>
+            </a:r>
+            <a:pPr indent="0" marL="0">
+              <a:lnSpc>
+                <a:spcPct val="120000"/>
+              </a:lnSpc>
+              <a:buNone/>
+            </a:pPr>
+            <a:r>
+              <a:rPr lang="en-US" sz="2300" b="1" dirty="0">
+                <a:solidFill>
+                  <a:srgbClr val="F2F0EA"/>
+                </a:solidFill>
+                <a:latin typeface="Georgia" pitchFamily="34" charset="0"/>
+                <a:ea typeface="Georgia" pitchFamily="34" charset="-122"/>
+                <a:cs typeface="Georgia" pitchFamily="34" charset="-120"/>
+              </a:rPr>
+              <a:t>adverbiais</a:t>
+            </a:r>
+            <a:pPr indent="0" marL="0">
+              <a:lnSpc>
+                <a:spcPct val="120000"/>
+              </a:lnSpc>
+              <a:buNone/>
+            </a:pPr>
+            <a:r>
+              <a:rPr lang="en-US" sz="2300" dirty="0">
+                <a:solidFill>
+                  <a:srgbClr val="F2F0EA"/>
+                </a:solidFill>
+                <a:latin typeface="Georgia" pitchFamily="34" charset="0"/>
+                <a:ea typeface="Georgia" pitchFamily="34" charset="-122"/>
+                <a:cs typeface="Georgia" pitchFamily="34" charset="-120"/>
+              </a:rPr>
+              <a:t> causais (porque), temporais (quando), condicionais (se), finais (para que), concessivas (embora), consecutivas (tão… que), comparativas (como).</a:t>
             </a:r>
             <a:endParaRPr lang="en-US" sz="2300" dirty="0"/>
           </a:p>
